--- a/ゲーム科2年/00_前期/ゲーム開発Ⅰ/ゲーム物理学/座学/20_仕事.pptx
+++ b/ゲーム科2年/00_前期/ゲーム開発Ⅰ/ゲーム物理学/座学/20_仕事.pptx
@@ -16,6 +16,7 @@
     <p:sldId id="269" r:id="rId10"/>
     <p:sldId id="270" r:id="rId11"/>
     <p:sldId id="271" r:id="rId12"/>
+    <p:sldId id="272" r:id="rId13"/>
   </p:sldIdLst>
   <p:sldSz cx="12192000" cy="6858000"/>
   <p:notesSz cx="6858000" cy="9144000"/>
@@ -269,7 +270,7 @@
           <a:p>
             <a:fld id="{E9CC885B-4903-4D54-9A93-00025F12DED9}" type="datetimeFigureOut">
               <a:rPr kumimoji="1" lang="ja-JP" altLang="en-US" smtClean="0"/>
-              <a:t>2025/9/30</a:t>
+              <a:t>2025/10/1</a:t>
             </a:fld>
             <a:endParaRPr kumimoji="1" lang="ja-JP" altLang="en-US"/>
           </a:p>
@@ -499,7 +500,7 @@
           <a:p>
             <a:fld id="{E9CC885B-4903-4D54-9A93-00025F12DED9}" type="datetimeFigureOut">
               <a:rPr kumimoji="1" lang="ja-JP" altLang="en-US" smtClean="0"/>
-              <a:t>2025/9/30</a:t>
+              <a:t>2025/10/1</a:t>
             </a:fld>
             <a:endParaRPr kumimoji="1" lang="ja-JP" altLang="en-US"/>
           </a:p>
@@ -739,7 +740,7 @@
           <a:p>
             <a:fld id="{E9CC885B-4903-4D54-9A93-00025F12DED9}" type="datetimeFigureOut">
               <a:rPr kumimoji="1" lang="ja-JP" altLang="en-US" smtClean="0"/>
-              <a:t>2025/9/30</a:t>
+              <a:t>2025/10/1</a:t>
             </a:fld>
             <a:endParaRPr kumimoji="1" lang="ja-JP" altLang="en-US"/>
           </a:p>
@@ -969,7 +970,7 @@
           <a:p>
             <a:fld id="{E9CC885B-4903-4D54-9A93-00025F12DED9}" type="datetimeFigureOut">
               <a:rPr kumimoji="1" lang="ja-JP" altLang="en-US" smtClean="0"/>
-              <a:t>2025/9/30</a:t>
+              <a:t>2025/10/1</a:t>
             </a:fld>
             <a:endParaRPr kumimoji="1" lang="ja-JP" altLang="en-US"/>
           </a:p>
@@ -1244,7 +1245,7 @@
           <a:p>
             <a:fld id="{E9CC885B-4903-4D54-9A93-00025F12DED9}" type="datetimeFigureOut">
               <a:rPr kumimoji="1" lang="ja-JP" altLang="en-US" smtClean="0"/>
-              <a:t>2025/9/30</a:t>
+              <a:t>2025/10/1</a:t>
             </a:fld>
             <a:endParaRPr kumimoji="1" lang="ja-JP" altLang="en-US"/>
           </a:p>
@@ -1573,7 +1574,7 @@
           <a:p>
             <a:fld id="{E9CC885B-4903-4D54-9A93-00025F12DED9}" type="datetimeFigureOut">
               <a:rPr kumimoji="1" lang="ja-JP" altLang="en-US" smtClean="0"/>
-              <a:t>2025/9/30</a:t>
+              <a:t>2025/10/1</a:t>
             </a:fld>
             <a:endParaRPr kumimoji="1" lang="ja-JP" altLang="en-US"/>
           </a:p>
@@ -2049,7 +2050,7 @@
           <a:p>
             <a:fld id="{E9CC885B-4903-4D54-9A93-00025F12DED9}" type="datetimeFigureOut">
               <a:rPr kumimoji="1" lang="ja-JP" altLang="en-US" smtClean="0"/>
-              <a:t>2025/9/30</a:t>
+              <a:t>2025/10/1</a:t>
             </a:fld>
             <a:endParaRPr kumimoji="1" lang="ja-JP" altLang="en-US"/>
           </a:p>
@@ -2190,7 +2191,7 @@
           <a:p>
             <a:fld id="{E9CC885B-4903-4D54-9A93-00025F12DED9}" type="datetimeFigureOut">
               <a:rPr kumimoji="1" lang="ja-JP" altLang="en-US" smtClean="0"/>
-              <a:t>2025/9/30</a:t>
+              <a:t>2025/10/1</a:t>
             </a:fld>
             <a:endParaRPr kumimoji="1" lang="ja-JP" altLang="en-US"/>
           </a:p>
@@ -2303,7 +2304,7 @@
           <a:p>
             <a:fld id="{E9CC885B-4903-4D54-9A93-00025F12DED9}" type="datetimeFigureOut">
               <a:rPr kumimoji="1" lang="ja-JP" altLang="en-US" smtClean="0"/>
-              <a:t>2025/9/30</a:t>
+              <a:t>2025/10/1</a:t>
             </a:fld>
             <a:endParaRPr kumimoji="1" lang="ja-JP" altLang="en-US"/>
           </a:p>
@@ -2646,7 +2647,7 @@
           <a:p>
             <a:fld id="{E9CC885B-4903-4D54-9A93-00025F12DED9}" type="datetimeFigureOut">
               <a:rPr kumimoji="1" lang="ja-JP" altLang="en-US" smtClean="0"/>
-              <a:t>2025/9/30</a:t>
+              <a:t>2025/10/1</a:t>
             </a:fld>
             <a:endParaRPr kumimoji="1" lang="ja-JP" altLang="en-US"/>
           </a:p>
@@ -2934,7 +2935,7 @@
           <a:p>
             <a:fld id="{E9CC885B-4903-4D54-9A93-00025F12DED9}" type="datetimeFigureOut">
               <a:rPr kumimoji="1" lang="ja-JP" altLang="en-US" smtClean="0"/>
-              <a:t>2025/9/30</a:t>
+              <a:t>2025/10/1</a:t>
             </a:fld>
             <a:endParaRPr kumimoji="1" lang="ja-JP" altLang="en-US"/>
           </a:p>
@@ -3207,7 +3208,7 @@
           <a:p>
             <a:fld id="{E9CC885B-4903-4D54-9A93-00025F12DED9}" type="datetimeFigureOut">
               <a:rPr kumimoji="1" lang="ja-JP" altLang="en-US" smtClean="0"/>
-              <a:t>2025/9/30</a:t>
+              <a:t>2025/10/1</a:t>
             </a:fld>
             <a:endParaRPr kumimoji="1" lang="ja-JP" altLang="en-US"/>
           </a:p>
@@ -3714,8 +3715,8 @@
           </a:p>
         </p:txBody>
       </p:sp>
-      <mc:AlternateContent xmlns:mc="http://schemas.openxmlformats.org/markup-compatibility/2006">
-        <mc:Choice xmlns:a14="http://schemas.microsoft.com/office/drawing/2010/main" Requires="a14">
+      <mc:AlternateContent xmlns:mc="http://schemas.openxmlformats.org/markup-compatibility/2006" xmlns:a14="http://schemas.microsoft.com/office/drawing/2010/main">
+        <mc:Choice Requires="a14">
           <p:sp>
             <p:nvSpPr>
               <p:cNvPr id="6" name="テキスト ボックス 5">
@@ -3984,7 +3985,7 @@
             </p:txBody>
           </p:sp>
         </mc:Choice>
-        <mc:Fallback>
+        <mc:Fallback xmlns="">
           <p:sp>
             <p:nvSpPr>
               <p:cNvPr id="6" name="テキスト ボックス 5">
@@ -4095,8 +4096,8 @@
           </a:p>
         </p:txBody>
       </p:sp>
-      <mc:AlternateContent xmlns:mc="http://schemas.openxmlformats.org/markup-compatibility/2006">
-        <mc:Choice xmlns:a14="http://schemas.microsoft.com/office/drawing/2010/main" Requires="a14">
+      <mc:AlternateContent xmlns:mc="http://schemas.openxmlformats.org/markup-compatibility/2006" xmlns:a14="http://schemas.microsoft.com/office/drawing/2010/main">
+        <mc:Choice Requires="a14">
           <p:sp>
             <p:nvSpPr>
               <p:cNvPr id="6" name="テキスト ボックス 5">
@@ -4519,7 +4520,7 @@
             </p:txBody>
           </p:sp>
         </mc:Choice>
-        <mc:Fallback>
+        <mc:Fallback xmlns="">
           <p:sp>
             <p:nvSpPr>
               <p:cNvPr id="6" name="テキスト ボックス 5">
@@ -4630,8 +4631,8 @@
           </a:p>
         </p:txBody>
       </p:sp>
-      <mc:AlternateContent xmlns:mc="http://schemas.openxmlformats.org/markup-compatibility/2006">
-        <mc:Choice xmlns:a14="http://schemas.microsoft.com/office/drawing/2010/main" Requires="a14">
+      <mc:AlternateContent xmlns:mc="http://schemas.openxmlformats.org/markup-compatibility/2006" xmlns:a14="http://schemas.microsoft.com/office/drawing/2010/main">
+        <mc:Choice Requires="a14">
           <p:sp>
             <p:nvSpPr>
               <p:cNvPr id="6" name="テキスト ボックス 5">
@@ -4972,7 +4973,7 @@
             </p:txBody>
           </p:sp>
         </mc:Choice>
-        <mc:Fallback>
+        <mc:Fallback xmlns="">
           <p:sp>
             <p:nvSpPr>
               <p:cNvPr id="6" name="テキスト ボックス 5">
@@ -5021,6 +5022,417 @@
     <p:extLst>
       <p:ext uri="{BB962C8B-B14F-4D97-AF65-F5344CB8AC3E}">
         <p14:creationId xmlns:p14="http://schemas.microsoft.com/office/powerpoint/2010/main" val="298940148"/>
+      </p:ext>
+    </p:extLst>
+  </p:cSld>
+  <p:clrMapOvr>
+    <a:masterClrMapping/>
+  </p:clrMapOvr>
+</p:sld>
+</file>
+
+<file path=ppt/slides/slide12.xml><?xml version="1.0" encoding="utf-8"?>
+<p:sld xmlns:a="http://schemas.openxmlformats.org/drawingml/2006/main" xmlns:r="http://schemas.openxmlformats.org/officeDocument/2006/relationships" xmlns:p="http://schemas.openxmlformats.org/presentationml/2006/main">
+  <p:cSld>
+    <p:spTree>
+      <p:nvGrpSpPr>
+        <p:cNvPr id="1" name=""/>
+        <p:cNvGrpSpPr/>
+        <p:nvPr/>
+      </p:nvGrpSpPr>
+      <p:grpSpPr>
+        <a:xfrm>
+          <a:off x="0" y="0"/>
+          <a:ext cx="0" cy="0"/>
+          <a:chOff x="0" y="0"/>
+          <a:chExt cx="0" cy="0"/>
+        </a:xfrm>
+      </p:grpSpPr>
+      <p:sp>
+        <p:nvSpPr>
+          <p:cNvPr id="4" name="テキスト ボックス 3">
+            <a:extLst>
+              <a:ext uri="{FF2B5EF4-FFF2-40B4-BE49-F238E27FC236}">
+                <a16:creationId xmlns:a16="http://schemas.microsoft.com/office/drawing/2014/main" id="{5A13BF46-B8C5-48AA-8308-C9ECFF431A18}"/>
+              </a:ext>
+            </a:extLst>
+          </p:cNvPr>
+          <p:cNvSpPr txBox="1"/>
+          <p:nvPr/>
+        </p:nvSpPr>
+        <p:spPr>
+          <a:xfrm>
+            <a:off x="567542" y="491954"/>
+            <a:ext cx="1943161" cy="584775"/>
+          </a:xfrm>
+          <a:prstGeom prst="rect">
+            <a:avLst/>
+          </a:prstGeom>
+          <a:noFill/>
+        </p:spPr>
+        <p:txBody>
+          <a:bodyPr wrap="none" rtlCol="0">
+            <a:spAutoFit/>
+          </a:bodyPr>
+          <a:lstStyle/>
+          <a:p>
+            <a:r>
+              <a:rPr kumimoji="1" lang="ja-JP" altLang="en-US" sz="3200" b="1" u="sng" dirty="0"/>
+              <a:t>仕事 練習</a:t>
+            </a:r>
+            <a:endParaRPr kumimoji="1" lang="en-US" altLang="ja-JP" sz="3200" b="1" u="sng" dirty="0"/>
+          </a:p>
+        </p:txBody>
+      </p:sp>
+      <mc:AlternateContent xmlns:mc="http://schemas.openxmlformats.org/markup-compatibility/2006">
+        <mc:Choice xmlns:a14="http://schemas.microsoft.com/office/drawing/2010/main" Requires="a14">
+          <p:sp>
+            <p:nvSpPr>
+              <p:cNvPr id="6" name="テキスト ボックス 5">
+                <a:extLst>
+                  <a:ext uri="{FF2B5EF4-FFF2-40B4-BE49-F238E27FC236}">
+                    <a16:creationId xmlns:a16="http://schemas.microsoft.com/office/drawing/2014/main" id="{55830AD6-028B-4C4E-80BF-B70DFC1C3A46}"/>
+                  </a:ext>
+                </a:extLst>
+              </p:cNvPr>
+              <p:cNvSpPr txBox="1"/>
+              <p:nvPr/>
+            </p:nvSpPr>
+            <p:spPr>
+              <a:xfrm>
+                <a:off x="567542" y="1216429"/>
+                <a:ext cx="9345828" cy="4569392"/>
+              </a:xfrm>
+              <a:prstGeom prst="rect">
+                <a:avLst/>
+              </a:prstGeom>
+              <a:noFill/>
+            </p:spPr>
+            <p:txBody>
+              <a:bodyPr wrap="none" rtlCol="0">
+                <a:spAutoFit/>
+              </a:bodyPr>
+              <a:lstStyle/>
+              <a:p>
+                <a:r>
+                  <a:rPr lang="ja-JP" altLang="en-US" sz="2400" dirty="0"/>
+                  <a:t>①ゲームのプレイヤーが</a:t>
+                </a:r>
+                <a14:m>
+                  <m:oMath xmlns:m="http://schemas.openxmlformats.org/officeDocument/2006/math">
+                    <m:r>
+                      <a:rPr lang="en-US" altLang="ja-JP" sz="2400" i="1" dirty="0">
+                        <a:latin typeface="Cambria Math" panose="02040503050406030204" pitchFamily="18" charset="0"/>
+                      </a:rPr>
+                      <m:t>1500</m:t>
+                    </m:r>
+                    <m:r>
+                      <a:rPr lang="en-US" altLang="ja-JP" sz="2400" i="1" dirty="0">
+                        <a:latin typeface="Cambria Math" panose="02040503050406030204" pitchFamily="18" charset="0"/>
+                      </a:rPr>
+                      <m:t>𝑁</m:t>
+                    </m:r>
+                  </m:oMath>
+                </a14:m>
+                <a:r>
+                  <a:rPr lang="ja-JP" altLang="en-US" sz="2400" dirty="0"/>
+                  <a:t>の力で箱を押している。</a:t>
+                </a:r>
+                <a:endParaRPr lang="en-US" altLang="ja-JP" sz="2400" dirty="0"/>
+              </a:p>
+              <a:p>
+                <a:r>
+                  <a:rPr lang="ja-JP" altLang="en-US" sz="2400" dirty="0"/>
+                  <a:t>　地面から</a:t>
+                </a:r>
+                <a14:m>
+                  <m:oMath xmlns:m="http://schemas.openxmlformats.org/officeDocument/2006/math">
+                    <m:r>
+                      <a:rPr lang="en-US" altLang="ja-JP" sz="2400" i="1" dirty="0">
+                        <a:latin typeface="Cambria Math" panose="02040503050406030204" pitchFamily="18" charset="0"/>
+                      </a:rPr>
+                      <m:t>4</m:t>
+                    </m:r>
+                    <m:r>
+                      <a:rPr lang="en-US" altLang="ja-JP" sz="2400" i="1" dirty="0">
+                        <a:latin typeface="Cambria Math" panose="02040503050406030204" pitchFamily="18" charset="0"/>
+                      </a:rPr>
+                      <m:t>0</m:t>
+                    </m:r>
+                    <m:r>
+                      <a:rPr lang="en-US" altLang="ja-JP" sz="2400" i="1" dirty="0">
+                        <a:latin typeface="Cambria Math" panose="02040503050406030204" pitchFamily="18" charset="0"/>
+                      </a:rPr>
+                      <m:t>𝑁</m:t>
+                    </m:r>
+                  </m:oMath>
+                </a14:m>
+                <a:r>
+                  <a:rPr lang="ja-JP" altLang="en-US" sz="2400" dirty="0"/>
+                  <a:t>の摩擦がある場合、</a:t>
+                </a:r>
+                <a:endParaRPr lang="en-US" altLang="ja-JP" sz="2400" dirty="0"/>
+              </a:p>
+              <a:p>
+                <a14:m>
+                  <m:oMath xmlns:m="http://schemas.openxmlformats.org/officeDocument/2006/math">
+                    <m:r>
+                      <a:rPr lang="ja-JP" altLang="en-US" sz="2400" i="1" dirty="0">
+                        <a:latin typeface="Cambria Math" panose="02040503050406030204" pitchFamily="18" charset="0"/>
+                      </a:rPr>
+                      <m:t>　</m:t>
+                    </m:r>
+                    <m:r>
+                      <a:rPr lang="en-US" altLang="ja-JP" sz="2400" i="1" dirty="0">
+                        <a:latin typeface="Cambria Math" panose="02040503050406030204" pitchFamily="18" charset="0"/>
+                      </a:rPr>
+                      <m:t>4</m:t>
+                    </m:r>
+                    <m:r>
+                      <a:rPr lang="en-US" altLang="ja-JP" sz="2400" i="1" dirty="0">
+                        <a:latin typeface="Cambria Math" panose="02040503050406030204" pitchFamily="18" charset="0"/>
+                      </a:rPr>
+                      <m:t>𝑚</m:t>
+                    </m:r>
+                  </m:oMath>
+                </a14:m>
+                <a:r>
+                  <a:rPr lang="ja-JP" altLang="en-US" sz="2400" dirty="0"/>
+                  <a:t>先まで箱押すのにどれだけ仕事をすることになるか。</a:t>
+                </a:r>
+                <a:endParaRPr lang="en-US" altLang="ja-JP" sz="2400" dirty="0"/>
+              </a:p>
+              <a:p>
+                <a:endParaRPr lang="en-US" altLang="ja-JP" sz="2400" dirty="0"/>
+              </a:p>
+              <a:p>
+                <a:r>
+                  <a:rPr lang="ja-JP" altLang="en-US" sz="2400" dirty="0"/>
+                  <a:t>② ①の状況で、押すのではなくロープを使って引きずる。</a:t>
+                </a:r>
+                <a:endParaRPr lang="en-US" altLang="ja-JP" sz="2400" dirty="0"/>
+              </a:p>
+              <a:p>
+                <a:r>
+                  <a:rPr lang="ja-JP" altLang="en-US" sz="2400" dirty="0"/>
+                  <a:t>　 ロープの角度が</a:t>
+                </a:r>
+                <a14:m>
+                  <m:oMath xmlns:m="http://schemas.openxmlformats.org/officeDocument/2006/math">
+                    <m:r>
+                      <a:rPr lang="en-US" altLang="ja-JP" sz="2400" i="1" dirty="0" smtClean="0">
+                        <a:latin typeface="Cambria Math" panose="02040503050406030204" pitchFamily="18" charset="0"/>
+                      </a:rPr>
+                      <m:t>30°</m:t>
+                    </m:r>
+                  </m:oMath>
+                </a14:m>
+                <a:r>
+                  <a:rPr lang="ja-JP" altLang="en-US" sz="2400" dirty="0"/>
+                  <a:t>のときはどれだけ仕事をすることになるか。</a:t>
+                </a:r>
+                <a:endParaRPr lang="en-US" altLang="ja-JP" sz="2400" dirty="0"/>
+              </a:p>
+              <a:p>
+                <a:r>
+                  <a:rPr lang="ja-JP" altLang="en-US" sz="2400" dirty="0"/>
+                  <a:t>　 </a:t>
+                </a:r>
+                <a14:m>
+                  <m:oMath xmlns:m="http://schemas.openxmlformats.org/officeDocument/2006/math">
+                    <m:r>
+                      <a:rPr lang="en-US" altLang="ja-JP" sz="2400" b="0" i="1" smtClean="0">
+                        <a:latin typeface="Cambria Math" panose="02040503050406030204" pitchFamily="18" charset="0"/>
+                      </a:rPr>
+                      <m:t>𝑐𝑜𝑠</m:t>
+                    </m:r>
+                    <m:r>
+                      <a:rPr lang="en-US" altLang="ja-JP" sz="2400" b="0" i="1" smtClean="0">
+                        <a:latin typeface="Cambria Math" panose="02040503050406030204" pitchFamily="18" charset="0"/>
+                      </a:rPr>
+                      <m:t>30°=0.86, </m:t>
+                    </m:r>
+                    <m:r>
+                      <a:rPr lang="en-US" altLang="ja-JP" sz="2400" b="0" i="1" smtClean="0">
+                        <a:latin typeface="Cambria Math" panose="02040503050406030204" pitchFamily="18" charset="0"/>
+                      </a:rPr>
+                      <m:t>𝑠𝑖𝑛</m:t>
+                    </m:r>
+                    <m:r>
+                      <a:rPr lang="en-US" altLang="ja-JP" sz="2400" b="0" i="1" smtClean="0">
+                        <a:latin typeface="Cambria Math" panose="02040503050406030204" pitchFamily="18" charset="0"/>
+                      </a:rPr>
+                      <m:t>30°=0.5</m:t>
+                    </m:r>
+                  </m:oMath>
+                </a14:m>
+                <a:r>
+                  <a:rPr lang="ja-JP" altLang="en-US" sz="2400" dirty="0"/>
+                  <a:t>とする</a:t>
+                </a:r>
+                <a:endParaRPr lang="en-US" altLang="ja-JP" sz="2400" dirty="0"/>
+              </a:p>
+              <a:p>
+                <a:endParaRPr lang="en-US" altLang="ja-JP" sz="2400" dirty="0"/>
+              </a:p>
+              <a:p>
+                <a:r>
+                  <a:rPr lang="ja-JP" altLang="en-US" sz="2400" dirty="0"/>
+                  <a:t>③ ②の状況で</a:t>
+                </a:r>
+                <a14:m>
+                  <m:oMath xmlns:m="http://schemas.openxmlformats.org/officeDocument/2006/math">
+                    <m:r>
+                      <a:rPr lang="en-US" altLang="ja-JP" sz="2400" i="1" dirty="0" smtClean="0">
+                        <a:latin typeface="Cambria Math" panose="02040503050406030204" pitchFamily="18" charset="0"/>
+                      </a:rPr>
+                      <m:t>15°</m:t>
+                    </m:r>
+                  </m:oMath>
+                </a14:m>
+                <a:r>
+                  <a:rPr lang="ja-JP" altLang="en-US" sz="2400" dirty="0"/>
+                  <a:t>の坂道で箱を引きずる。</a:t>
+                </a:r>
+                <a:endParaRPr lang="en-US" altLang="ja-JP" sz="2400" dirty="0"/>
+              </a:p>
+              <a:p>
+                <a:r>
+                  <a:rPr lang="ja-JP" altLang="en-US" sz="2400" dirty="0"/>
+                  <a:t>　 どれだけ仕事をすることになるか。</a:t>
+                </a:r>
+                <a:endParaRPr lang="en-US" altLang="ja-JP" sz="2400" dirty="0"/>
+              </a:p>
+              <a:p>
+                <a:r>
+                  <a:rPr lang="ja-JP" altLang="en-US" sz="2400" dirty="0"/>
+                  <a:t>　 </a:t>
+                </a:r>
+                <a14:m>
+                  <m:oMath xmlns:m="http://schemas.openxmlformats.org/officeDocument/2006/math">
+                    <m:r>
+                      <a:rPr lang="en-US" altLang="ja-JP" sz="2400" b="0" i="1" smtClean="0">
+                        <a:latin typeface="Cambria Math" panose="02040503050406030204" pitchFamily="18" charset="0"/>
+                      </a:rPr>
+                      <m:t>𝑐𝑜𝑠</m:t>
+                    </m:r>
+                    <m:r>
+                      <a:rPr lang="en-US" altLang="ja-JP" sz="2400" i="1">
+                        <a:latin typeface="Cambria Math" panose="02040503050406030204" pitchFamily="18" charset="0"/>
+                      </a:rPr>
+                      <m:t>15</m:t>
+                    </m:r>
+                    <m:r>
+                      <a:rPr lang="en-US" altLang="ja-JP" sz="2400" b="0" i="1" smtClean="0">
+                        <a:latin typeface="Cambria Math" panose="02040503050406030204" pitchFamily="18" charset="0"/>
+                      </a:rPr>
+                      <m:t>°=0.</m:t>
+                    </m:r>
+                    <m:r>
+                      <a:rPr lang="en-US" altLang="ja-JP" sz="2400" i="1">
+                        <a:latin typeface="Cambria Math" panose="02040503050406030204" pitchFamily="18" charset="0"/>
+                      </a:rPr>
+                      <m:t>9</m:t>
+                    </m:r>
+                    <m:r>
+                      <a:rPr lang="en-US" altLang="ja-JP" sz="2400" b="0" i="1" smtClean="0">
+                        <a:latin typeface="Cambria Math" panose="02040503050406030204" pitchFamily="18" charset="0"/>
+                      </a:rPr>
+                      <m:t>6, </m:t>
+                    </m:r>
+                    <m:r>
+                      <a:rPr lang="en-US" altLang="ja-JP" sz="2400" b="0" i="1" smtClean="0">
+                        <a:latin typeface="Cambria Math" panose="02040503050406030204" pitchFamily="18" charset="0"/>
+                      </a:rPr>
+                      <m:t>𝑠𝑖𝑛</m:t>
+                    </m:r>
+                    <m:r>
+                      <a:rPr lang="en-US" altLang="ja-JP" sz="2400" i="1">
+                        <a:latin typeface="Cambria Math" panose="02040503050406030204" pitchFamily="18" charset="0"/>
+                      </a:rPr>
+                      <m:t>15</m:t>
+                    </m:r>
+                    <m:r>
+                      <a:rPr lang="en-US" altLang="ja-JP" sz="2400" b="0" i="1" smtClean="0">
+                        <a:latin typeface="Cambria Math" panose="02040503050406030204" pitchFamily="18" charset="0"/>
+                      </a:rPr>
+                      <m:t>°=0.</m:t>
+                    </m:r>
+                    <m:r>
+                      <a:rPr lang="en-US" altLang="ja-JP" sz="2400" i="1">
+                        <a:latin typeface="Cambria Math" panose="02040503050406030204" pitchFamily="18" charset="0"/>
+                      </a:rPr>
+                      <m:t>2</m:t>
+                    </m:r>
+                    <m:r>
+                      <a:rPr lang="en-US" altLang="ja-JP" sz="2400" b="0" i="1" smtClean="0">
+                        <a:latin typeface="Cambria Math" panose="02040503050406030204" pitchFamily="18" charset="0"/>
+                      </a:rPr>
+                      <m:t>5</m:t>
+                    </m:r>
+                  </m:oMath>
+                </a14:m>
+                <a:r>
+                  <a:rPr lang="ja-JP" altLang="en-US" sz="2400" dirty="0"/>
+                  <a:t>とする</a:t>
+                </a:r>
+                <a:endParaRPr lang="en-US" altLang="ja-JP" sz="2400" dirty="0"/>
+              </a:p>
+              <a:p>
+                <a:endParaRPr lang="en-US" altLang="ja-JP" sz="2400" dirty="0"/>
+              </a:p>
+            </p:txBody>
+          </p:sp>
+        </mc:Choice>
+        <mc:Fallback>
+          <p:sp>
+            <p:nvSpPr>
+              <p:cNvPr id="6" name="テキスト ボックス 5">
+                <a:extLst>
+                  <a:ext uri="{FF2B5EF4-FFF2-40B4-BE49-F238E27FC236}">
+                    <a16:creationId xmlns:a16="http://schemas.microsoft.com/office/drawing/2014/main" id="{55830AD6-028B-4C4E-80BF-B70DFC1C3A46}"/>
+                  </a:ext>
+                </a:extLst>
+              </p:cNvPr>
+              <p:cNvSpPr txBox="1">
+                <a:spLocks noRot="1" noChangeAspect="1" noMove="1" noResize="1" noEditPoints="1" noAdjustHandles="1" noChangeArrowheads="1" noChangeShapeType="1" noTextEdit="1"/>
+              </p:cNvSpPr>
+              <p:nvPr/>
+            </p:nvSpPr>
+            <p:spPr>
+              <a:xfrm>
+                <a:off x="567542" y="1216429"/>
+                <a:ext cx="9345828" cy="4569392"/>
+              </a:xfrm>
+              <a:prstGeom prst="rect">
+                <a:avLst/>
+              </a:prstGeom>
+              <a:blipFill>
+                <a:blip r:embed="rId2"/>
+                <a:stretch>
+                  <a:fillRect l="-978" t="-1068" r="-65"/>
+                </a:stretch>
+              </a:blipFill>
+            </p:spPr>
+            <p:txBody>
+              <a:bodyPr/>
+              <a:lstStyle/>
+              <a:p>
+                <a:r>
+                  <a:rPr lang="ja-JP" altLang="en-US">
+                    <a:noFill/>
+                  </a:rPr>
+                  <a:t> </a:t>
+                </a:r>
+              </a:p>
+            </p:txBody>
+          </p:sp>
+        </mc:Fallback>
+      </mc:AlternateContent>
+    </p:spTree>
+    <p:extLst>
+      <p:ext uri="{BB962C8B-B14F-4D97-AF65-F5344CB8AC3E}">
+        <p14:creationId xmlns:p14="http://schemas.microsoft.com/office/powerpoint/2010/main" val="3613598417"/>
       </p:ext>
     </p:extLst>
   </p:cSld>
@@ -5137,8 +5549,8 @@
           </a:p>
         </p:txBody>
       </p:sp>
-      <mc:AlternateContent xmlns:mc="http://schemas.openxmlformats.org/markup-compatibility/2006">
-        <mc:Choice xmlns:a14="http://schemas.microsoft.com/office/drawing/2010/main" Requires="a14">
+      <mc:AlternateContent xmlns:mc="http://schemas.openxmlformats.org/markup-compatibility/2006" xmlns:a14="http://schemas.microsoft.com/office/drawing/2010/main">
+        <mc:Choice Requires="a14">
           <p:sp>
             <p:nvSpPr>
               <p:cNvPr id="6" name="テキスト ボックス 5">
@@ -5407,7 +5819,7 @@
             </p:txBody>
           </p:sp>
         </mc:Choice>
-        <mc:Fallback>
+        <mc:Fallback xmlns="">
           <p:sp>
             <p:nvSpPr>
               <p:cNvPr id="6" name="テキスト ボックス 5">
@@ -5518,8 +5930,8 @@
           </a:p>
         </p:txBody>
       </p:sp>
-      <mc:AlternateContent xmlns:mc="http://schemas.openxmlformats.org/markup-compatibility/2006">
-        <mc:Choice xmlns:a14="http://schemas.microsoft.com/office/drawing/2010/main" Requires="a14">
+      <mc:AlternateContent xmlns:mc="http://schemas.openxmlformats.org/markup-compatibility/2006" xmlns:a14="http://schemas.microsoft.com/office/drawing/2010/main">
+        <mc:Choice Requires="a14">
           <p:sp>
             <p:nvSpPr>
               <p:cNvPr id="6" name="テキスト ボックス 5">
@@ -5881,7 +6293,7 @@
             </p:txBody>
           </p:sp>
         </mc:Choice>
-        <mc:Fallback>
+        <mc:Fallback xmlns="">
           <p:sp>
             <p:nvSpPr>
               <p:cNvPr id="6" name="テキスト ボックス 5">
@@ -6309,8 +6721,8 @@
           </a:p>
         </p:txBody>
       </p:sp>
-      <mc:AlternateContent xmlns:mc="http://schemas.openxmlformats.org/markup-compatibility/2006">
-        <mc:Choice xmlns:a14="http://schemas.microsoft.com/office/drawing/2010/main" Requires="a14">
+      <mc:AlternateContent xmlns:mc="http://schemas.openxmlformats.org/markup-compatibility/2006" xmlns:a14="http://schemas.microsoft.com/office/drawing/2010/main">
+        <mc:Choice Requires="a14">
           <p:sp>
             <p:nvSpPr>
               <p:cNvPr id="18" name="テキスト ボックス 17">
@@ -6339,6 +6751,7 @@
               </a:bodyPr>
               <a:lstStyle/>
               <a:p>
+                <a:pPr/>
                 <a14:m>
                   <m:oMathPara xmlns:m="http://schemas.openxmlformats.org/officeDocument/2006/math">
                     <m:oMathParaPr>
@@ -6359,7 +6772,7 @@
             </p:txBody>
           </p:sp>
         </mc:Choice>
-        <mc:Fallback>
+        <mc:Fallback xmlns="">
           <p:sp>
             <p:nvSpPr>
               <p:cNvPr id="18" name="テキスト ボックス 17">
@@ -6700,8 +7113,8 @@
           </a:fontRef>
         </p:style>
       </p:cxnSp>
-      <mc:AlternateContent xmlns:mc="http://schemas.openxmlformats.org/markup-compatibility/2006">
-        <mc:Choice xmlns:a14="http://schemas.microsoft.com/office/drawing/2010/main" Requires="a14">
+      <mc:AlternateContent xmlns:mc="http://schemas.openxmlformats.org/markup-compatibility/2006" xmlns:a14="http://schemas.microsoft.com/office/drawing/2010/main">
+        <mc:Choice Requires="a14">
           <p:sp>
             <p:nvSpPr>
               <p:cNvPr id="17" name="テキスト ボックス 16">
@@ -6798,7 +7211,7 @@
             </p:txBody>
           </p:sp>
         </mc:Choice>
-        <mc:Fallback>
+        <mc:Fallback xmlns="">
           <p:sp>
             <p:nvSpPr>
               <p:cNvPr id="17" name="テキスト ボックス 16">
@@ -6843,8 +7256,8 @@
           </p:sp>
         </mc:Fallback>
       </mc:AlternateContent>
-      <mc:AlternateContent xmlns:mc="http://schemas.openxmlformats.org/markup-compatibility/2006">
-        <mc:Choice xmlns:a14="http://schemas.microsoft.com/office/drawing/2010/main" Requires="a14">
+      <mc:AlternateContent xmlns:mc="http://schemas.openxmlformats.org/markup-compatibility/2006" xmlns:a14="http://schemas.microsoft.com/office/drawing/2010/main">
+        <mc:Choice Requires="a14">
           <p:sp>
             <p:nvSpPr>
               <p:cNvPr id="18" name="テキスト ボックス 17">
@@ -6873,6 +7286,7 @@
               </a:bodyPr>
               <a:lstStyle/>
               <a:p>
+                <a:pPr/>
                 <a14:m>
                   <m:oMathPara xmlns:m="http://schemas.openxmlformats.org/officeDocument/2006/math">
                     <m:oMathParaPr>
@@ -6893,7 +7307,7 @@
             </p:txBody>
           </p:sp>
         </mc:Choice>
-        <mc:Fallback>
+        <mc:Fallback xmlns="">
           <p:sp>
             <p:nvSpPr>
               <p:cNvPr id="18" name="テキスト ボックス 17">
@@ -6938,8 +7352,8 @@
           </p:sp>
         </mc:Fallback>
       </mc:AlternateContent>
-      <mc:AlternateContent xmlns:mc="http://schemas.openxmlformats.org/markup-compatibility/2006">
-        <mc:Choice xmlns:a14="http://schemas.microsoft.com/office/drawing/2010/main" Requires="a14">
+      <mc:AlternateContent xmlns:mc="http://schemas.openxmlformats.org/markup-compatibility/2006" xmlns:a14="http://schemas.microsoft.com/office/drawing/2010/main">
+        <mc:Choice Requires="a14">
           <p:sp>
             <p:nvSpPr>
               <p:cNvPr id="12" name="テキスト ボックス 11">
@@ -6968,6 +7382,7 @@
               </a:bodyPr>
               <a:lstStyle/>
               <a:p>
+                <a:pPr/>
                 <a14:m>
                   <m:oMathPara xmlns:m="http://schemas.openxmlformats.org/officeDocument/2006/math">
                     <m:oMathParaPr>
@@ -6991,7 +7406,7 @@
             </p:txBody>
           </p:sp>
         </mc:Choice>
-        <mc:Fallback>
+        <mc:Fallback xmlns="">
           <p:sp>
             <p:nvSpPr>
               <p:cNvPr id="12" name="テキスト ボックス 11">
@@ -7036,8 +7451,8 @@
           </p:sp>
         </mc:Fallback>
       </mc:AlternateContent>
-      <mc:AlternateContent xmlns:mc="http://schemas.openxmlformats.org/markup-compatibility/2006">
-        <mc:Choice xmlns:a14="http://schemas.microsoft.com/office/drawing/2010/main" Requires="a14">
+      <mc:AlternateContent xmlns:mc="http://schemas.openxmlformats.org/markup-compatibility/2006" xmlns:a14="http://schemas.microsoft.com/office/drawing/2010/main">
+        <mc:Choice Requires="a14">
           <p:sp>
             <p:nvSpPr>
               <p:cNvPr id="14" name="テキスト ボックス 13">
@@ -7066,6 +7481,7 @@
               </a:bodyPr>
               <a:lstStyle/>
               <a:p>
+                <a:pPr/>
                 <a14:m>
                   <m:oMathPara xmlns:m="http://schemas.openxmlformats.org/officeDocument/2006/math">
                     <m:oMathParaPr>
@@ -7095,7 +7511,7 @@
             </p:txBody>
           </p:sp>
         </mc:Choice>
-        <mc:Fallback>
+        <mc:Fallback xmlns="">
           <p:sp>
             <p:nvSpPr>
               <p:cNvPr id="14" name="テキスト ボックス 13">
@@ -7333,8 +7749,8 @@
           </a:p>
         </p:txBody>
       </p:sp>
-      <mc:AlternateContent xmlns:mc="http://schemas.openxmlformats.org/markup-compatibility/2006">
-        <mc:Choice xmlns:a14="http://schemas.microsoft.com/office/drawing/2010/main" Requires="a14">
+      <mc:AlternateContent xmlns:mc="http://schemas.openxmlformats.org/markup-compatibility/2006" xmlns:a14="http://schemas.microsoft.com/office/drawing/2010/main">
+        <mc:Choice Requires="a14">
           <p:sp>
             <p:nvSpPr>
               <p:cNvPr id="6" name="テキスト ボックス 5">
@@ -7754,7 +8170,7 @@
             </p:txBody>
           </p:sp>
         </mc:Choice>
-        <mc:Fallback>
+        <mc:Fallback xmlns="">
           <p:sp>
             <p:nvSpPr>
               <p:cNvPr id="6" name="テキスト ボックス 5">
@@ -8079,8 +8495,8 @@
             </a:fontRef>
           </p:style>
         </p:cxnSp>
-        <mc:AlternateContent xmlns:mc="http://schemas.openxmlformats.org/markup-compatibility/2006">
-          <mc:Choice xmlns:a14="http://schemas.microsoft.com/office/drawing/2010/main" Requires="a14">
+        <mc:AlternateContent xmlns:mc="http://schemas.openxmlformats.org/markup-compatibility/2006" xmlns:a14="http://schemas.microsoft.com/office/drawing/2010/main">
+          <mc:Choice Requires="a14">
             <p:sp>
               <p:nvSpPr>
                 <p:cNvPr id="18" name="テキスト ボックス 17">
@@ -8109,6 +8525,7 @@
                 </a:bodyPr>
                 <a:lstStyle/>
                 <a:p>
+                  <a:pPr/>
                   <a14:m>
                     <m:oMathPara xmlns:m="http://schemas.openxmlformats.org/officeDocument/2006/math">
                       <m:oMathParaPr>
@@ -8129,7 +8546,7 @@
               </p:txBody>
             </p:sp>
           </mc:Choice>
-          <mc:Fallback>
+          <mc:Fallback xmlns="">
             <p:sp>
               <p:nvSpPr>
                 <p:cNvPr id="18" name="テキスト ボックス 17">
@@ -8282,8 +8699,8 @@
           </a:p>
         </p:txBody>
       </p:sp>
-      <mc:AlternateContent xmlns:mc="http://schemas.openxmlformats.org/markup-compatibility/2006">
-        <mc:Choice xmlns:a14="http://schemas.microsoft.com/office/drawing/2010/main" Requires="a14">
+      <mc:AlternateContent xmlns:mc="http://schemas.openxmlformats.org/markup-compatibility/2006" xmlns:a14="http://schemas.microsoft.com/office/drawing/2010/main">
+        <mc:Choice Requires="a14">
           <p:sp>
             <p:nvSpPr>
               <p:cNvPr id="6" name="テキスト ボックス 5">
@@ -8358,7 +8775,7 @@
             </p:txBody>
           </p:sp>
         </mc:Choice>
-        <mc:Fallback>
+        <mc:Fallback xmlns="">
           <p:sp>
             <p:nvSpPr>
               <p:cNvPr id="6" name="テキスト ボックス 5">
@@ -8581,8 +8998,8 @@
             </a:fontRef>
           </p:style>
         </p:cxnSp>
-        <mc:AlternateContent xmlns:mc="http://schemas.openxmlformats.org/markup-compatibility/2006">
-          <mc:Choice xmlns:a14="http://schemas.microsoft.com/office/drawing/2010/main" Requires="a14">
+        <mc:AlternateContent xmlns:mc="http://schemas.openxmlformats.org/markup-compatibility/2006" xmlns:a14="http://schemas.microsoft.com/office/drawing/2010/main">
+          <mc:Choice Requires="a14">
             <p:sp>
               <p:nvSpPr>
                 <p:cNvPr id="18" name="テキスト ボックス 17">
@@ -8611,6 +9028,7 @@
                 </a:bodyPr>
                 <a:lstStyle/>
                 <a:p>
+                  <a:pPr/>
                   <a14:m>
                     <m:oMathPara xmlns:m="http://schemas.openxmlformats.org/officeDocument/2006/math">
                       <m:oMathParaPr>
@@ -8631,7 +9049,7 @@
               </p:txBody>
             </p:sp>
           </mc:Choice>
-          <mc:Fallback>
+          <mc:Fallback xmlns="">
             <p:sp>
               <p:nvSpPr>
                 <p:cNvPr id="18" name="テキスト ボックス 17">
@@ -8763,8 +9181,8 @@
           </a:fontRef>
         </p:style>
       </p:cxnSp>
-      <mc:AlternateContent xmlns:mc="http://schemas.openxmlformats.org/markup-compatibility/2006">
-        <mc:Choice xmlns:a14="http://schemas.microsoft.com/office/drawing/2010/main" Requires="a14">
+      <mc:AlternateContent xmlns:mc="http://schemas.openxmlformats.org/markup-compatibility/2006" xmlns:a14="http://schemas.microsoft.com/office/drawing/2010/main">
+        <mc:Choice Requires="a14">
           <p:sp>
             <p:nvSpPr>
               <p:cNvPr id="19" name="テキスト ボックス 18">
@@ -8877,7 +9295,7 @@
             </p:txBody>
           </p:sp>
         </mc:Choice>
-        <mc:Fallback>
+        <mc:Fallback xmlns="">
           <p:sp>
             <p:nvSpPr>
               <p:cNvPr id="19" name="テキスト ボックス 18">
@@ -8965,8 +9383,8 @@
           </a:fontRef>
         </p:style>
       </p:cxnSp>
-      <mc:AlternateContent xmlns:mc="http://schemas.openxmlformats.org/markup-compatibility/2006">
-        <mc:Choice xmlns:a14="http://schemas.microsoft.com/office/drawing/2010/main" Requires="a14">
+      <mc:AlternateContent xmlns:mc="http://schemas.openxmlformats.org/markup-compatibility/2006" xmlns:a14="http://schemas.microsoft.com/office/drawing/2010/main">
+        <mc:Choice Requires="a14">
           <p:sp>
             <p:nvSpPr>
               <p:cNvPr id="22" name="テキスト ボックス 21">
@@ -8995,6 +9413,7 @@
               </a:bodyPr>
               <a:lstStyle/>
               <a:p>
+                <a:pPr/>
                 <a14:m>
                   <m:oMathPara xmlns:m="http://schemas.openxmlformats.org/officeDocument/2006/math">
                     <m:oMathParaPr>
@@ -9015,7 +9434,7 @@
             </p:txBody>
           </p:sp>
         </mc:Choice>
-        <mc:Fallback>
+        <mc:Fallback xmlns="">
           <p:sp>
             <p:nvSpPr>
               <p:cNvPr id="22" name="テキスト ボックス 21">
@@ -9060,8 +9479,8 @@
           </p:sp>
         </mc:Fallback>
       </mc:AlternateContent>
-      <mc:AlternateContent xmlns:mc="http://schemas.openxmlformats.org/markup-compatibility/2006">
-        <mc:Choice xmlns:a14="http://schemas.microsoft.com/office/drawing/2010/main" Requires="a14">
+      <mc:AlternateContent xmlns:mc="http://schemas.openxmlformats.org/markup-compatibility/2006" xmlns:a14="http://schemas.microsoft.com/office/drawing/2010/main">
+        <mc:Choice Requires="a14">
           <p:sp>
             <p:nvSpPr>
               <p:cNvPr id="23" name="テキスト ボックス 22">
@@ -9126,7 +9545,7 @@
             </p:txBody>
           </p:sp>
         </mc:Choice>
-        <mc:Fallback>
+        <mc:Fallback xmlns="">
           <p:sp>
             <p:nvSpPr>
               <p:cNvPr id="23" name="テキスト ボックス 22">
@@ -9237,8 +9656,8 @@
           </a:p>
         </p:txBody>
       </p:sp>
-      <mc:AlternateContent xmlns:mc="http://schemas.openxmlformats.org/markup-compatibility/2006">
-        <mc:Choice xmlns:a14="http://schemas.microsoft.com/office/drawing/2010/main" Requires="a14">
+      <mc:AlternateContent xmlns:mc="http://schemas.openxmlformats.org/markup-compatibility/2006" xmlns:a14="http://schemas.microsoft.com/office/drawing/2010/main">
+        <mc:Choice Requires="a14">
           <p:sp>
             <p:nvSpPr>
               <p:cNvPr id="6" name="テキスト ボックス 5">
@@ -9286,7 +9705,7 @@
             </p:txBody>
           </p:sp>
         </mc:Choice>
-        <mc:Fallback>
+        <mc:Fallback xmlns="">
           <p:sp>
             <p:nvSpPr>
               <p:cNvPr id="6" name="テキスト ボックス 5">
@@ -9509,8 +9928,8 @@
             </a:fontRef>
           </p:style>
         </p:cxnSp>
-        <mc:AlternateContent xmlns:mc="http://schemas.openxmlformats.org/markup-compatibility/2006">
-          <mc:Choice xmlns:a14="http://schemas.microsoft.com/office/drawing/2010/main" Requires="a14">
+        <mc:AlternateContent xmlns:mc="http://schemas.openxmlformats.org/markup-compatibility/2006" xmlns:a14="http://schemas.microsoft.com/office/drawing/2010/main">
+          <mc:Choice Requires="a14">
             <p:sp>
               <p:nvSpPr>
                 <p:cNvPr id="18" name="テキスト ボックス 17">
@@ -9539,6 +9958,7 @@
                 </a:bodyPr>
                 <a:lstStyle/>
                 <a:p>
+                  <a:pPr/>
                   <a14:m>
                     <m:oMathPara xmlns:m="http://schemas.openxmlformats.org/officeDocument/2006/math">
                       <m:oMathParaPr>
@@ -9559,7 +9979,7 @@
               </p:txBody>
             </p:sp>
           </mc:Choice>
-          <mc:Fallback>
+          <mc:Fallback xmlns="">
             <p:sp>
               <p:nvSpPr>
                 <p:cNvPr id="18" name="テキスト ボックス 17">
@@ -9734,8 +10154,8 @@
           </a:fontRef>
         </p:style>
       </p:cxnSp>
-      <mc:AlternateContent xmlns:mc="http://schemas.openxmlformats.org/markup-compatibility/2006">
-        <mc:Choice xmlns:a14="http://schemas.microsoft.com/office/drawing/2010/main" Requires="a14">
+      <mc:AlternateContent xmlns:mc="http://schemas.openxmlformats.org/markup-compatibility/2006" xmlns:a14="http://schemas.microsoft.com/office/drawing/2010/main">
+        <mc:Choice Requires="a14">
           <p:sp>
             <p:nvSpPr>
               <p:cNvPr id="22" name="テキスト ボックス 21">
@@ -9764,6 +10184,7 @@
               </a:bodyPr>
               <a:lstStyle/>
               <a:p>
+                <a:pPr/>
                 <a14:m>
                   <m:oMathPara xmlns:m="http://schemas.openxmlformats.org/officeDocument/2006/math">
                     <m:oMathParaPr>
@@ -9814,7 +10235,7 @@
             </p:txBody>
           </p:sp>
         </mc:Choice>
-        <mc:Fallback>
+        <mc:Fallback xmlns="">
           <p:sp>
             <p:nvSpPr>
               <p:cNvPr id="22" name="テキスト ボックス 21">
